--- a/ゲーム科1年/01_後期/プログラミングⅢ/17_リストクラス.pptx
+++ b/ゲーム科1年/01_後期/プログラミングⅢ/17_リストクラス.pptx
@@ -268,7 +268,7 @@
           <a:p>
             <a:fld id="{E9CC885B-4903-4D54-9A93-00025F12DED9}" type="datetimeFigureOut">
               <a:rPr kumimoji="1" lang="ja-JP" altLang="en-US" smtClean="0"/>
-              <a:t>2024/11/12</a:t>
+              <a:t>2025/3/3</a:t>
             </a:fld>
             <a:endParaRPr kumimoji="1" lang="ja-JP" altLang="en-US"/>
           </a:p>
@@ -498,7 +498,7 @@
           <a:p>
             <a:fld id="{E9CC885B-4903-4D54-9A93-00025F12DED9}" type="datetimeFigureOut">
               <a:rPr kumimoji="1" lang="ja-JP" altLang="en-US" smtClean="0"/>
-              <a:t>2024/11/12</a:t>
+              <a:t>2025/3/3</a:t>
             </a:fld>
             <a:endParaRPr kumimoji="1" lang="ja-JP" altLang="en-US"/>
           </a:p>
@@ -738,7 +738,7 @@
           <a:p>
             <a:fld id="{E9CC885B-4903-4D54-9A93-00025F12DED9}" type="datetimeFigureOut">
               <a:rPr kumimoji="1" lang="ja-JP" altLang="en-US" smtClean="0"/>
-              <a:t>2024/11/12</a:t>
+              <a:t>2025/3/3</a:t>
             </a:fld>
             <a:endParaRPr kumimoji="1" lang="ja-JP" altLang="en-US"/>
           </a:p>
@@ -968,7 +968,7 @@
           <a:p>
             <a:fld id="{E9CC885B-4903-4D54-9A93-00025F12DED9}" type="datetimeFigureOut">
               <a:rPr kumimoji="1" lang="ja-JP" altLang="en-US" smtClean="0"/>
-              <a:t>2024/11/12</a:t>
+              <a:t>2025/3/3</a:t>
             </a:fld>
             <a:endParaRPr kumimoji="1" lang="ja-JP" altLang="en-US"/>
           </a:p>
@@ -1243,7 +1243,7 @@
           <a:p>
             <a:fld id="{E9CC885B-4903-4D54-9A93-00025F12DED9}" type="datetimeFigureOut">
               <a:rPr kumimoji="1" lang="ja-JP" altLang="en-US" smtClean="0"/>
-              <a:t>2024/11/12</a:t>
+              <a:t>2025/3/3</a:t>
             </a:fld>
             <a:endParaRPr kumimoji="1" lang="ja-JP" altLang="en-US"/>
           </a:p>
@@ -1572,7 +1572,7 @@
           <a:p>
             <a:fld id="{E9CC885B-4903-4D54-9A93-00025F12DED9}" type="datetimeFigureOut">
               <a:rPr kumimoji="1" lang="ja-JP" altLang="en-US" smtClean="0"/>
-              <a:t>2024/11/12</a:t>
+              <a:t>2025/3/3</a:t>
             </a:fld>
             <a:endParaRPr kumimoji="1" lang="ja-JP" altLang="en-US"/>
           </a:p>
@@ -2048,7 +2048,7 @@
           <a:p>
             <a:fld id="{E9CC885B-4903-4D54-9A93-00025F12DED9}" type="datetimeFigureOut">
               <a:rPr kumimoji="1" lang="ja-JP" altLang="en-US" smtClean="0"/>
-              <a:t>2024/11/12</a:t>
+              <a:t>2025/3/3</a:t>
             </a:fld>
             <a:endParaRPr kumimoji="1" lang="ja-JP" altLang="en-US"/>
           </a:p>
@@ -2189,7 +2189,7 @@
           <a:p>
             <a:fld id="{E9CC885B-4903-4D54-9A93-00025F12DED9}" type="datetimeFigureOut">
               <a:rPr kumimoji="1" lang="ja-JP" altLang="en-US" smtClean="0"/>
-              <a:t>2024/11/12</a:t>
+              <a:t>2025/3/3</a:t>
             </a:fld>
             <a:endParaRPr kumimoji="1" lang="ja-JP" altLang="en-US"/>
           </a:p>
@@ -2302,7 +2302,7 @@
           <a:p>
             <a:fld id="{E9CC885B-4903-4D54-9A93-00025F12DED9}" type="datetimeFigureOut">
               <a:rPr kumimoji="1" lang="ja-JP" altLang="en-US" smtClean="0"/>
-              <a:t>2024/11/12</a:t>
+              <a:t>2025/3/3</a:t>
             </a:fld>
             <a:endParaRPr kumimoji="1" lang="ja-JP" altLang="en-US"/>
           </a:p>
@@ -2645,7 +2645,7 @@
           <a:p>
             <a:fld id="{E9CC885B-4903-4D54-9A93-00025F12DED9}" type="datetimeFigureOut">
               <a:rPr kumimoji="1" lang="ja-JP" altLang="en-US" smtClean="0"/>
-              <a:t>2024/11/12</a:t>
+              <a:t>2025/3/3</a:t>
             </a:fld>
             <a:endParaRPr kumimoji="1" lang="ja-JP" altLang="en-US"/>
           </a:p>
@@ -2933,7 +2933,7 @@
           <a:p>
             <a:fld id="{E9CC885B-4903-4D54-9A93-00025F12DED9}" type="datetimeFigureOut">
               <a:rPr kumimoji="1" lang="ja-JP" altLang="en-US" smtClean="0"/>
-              <a:t>2024/11/12</a:t>
+              <a:t>2025/3/3</a:t>
             </a:fld>
             <a:endParaRPr kumimoji="1" lang="ja-JP" altLang="en-US"/>
           </a:p>
@@ -3206,7 +3206,7 @@
           <a:p>
             <a:fld id="{E9CC885B-4903-4D54-9A93-00025F12DED9}" type="datetimeFigureOut">
               <a:rPr kumimoji="1" lang="ja-JP" altLang="en-US" smtClean="0"/>
-              <a:t>2024/11/12</a:t>
+              <a:t>2025/3/3</a:t>
             </a:fld>
             <a:endParaRPr kumimoji="1" lang="ja-JP" altLang="en-US"/>
           </a:p>
@@ -3983,7 +3983,7 @@
         <p:spPr>
           <a:xfrm>
             <a:off x="567542" y="1216429"/>
-            <a:ext cx="4876656" cy="461665"/>
+            <a:ext cx="4956806" cy="461665"/>
           </a:xfrm>
           <a:prstGeom prst="rect">
             <a:avLst/>
@@ -3997,7 +3997,11 @@
           <a:lstStyle/>
           <a:p>
             <a:r>
-              <a:rPr lang="en-US" altLang="ja-JP" sz="2400" dirty="0"/>
+              <a:rPr lang="en-US" altLang="ja-JP" sz="2400" b="1" dirty="0">
+                <a:solidFill>
+                  <a:srgbClr val="FF0000"/>
+                </a:solidFill>
+              </a:rPr>
               <a:t>Main.cpp</a:t>
             </a:r>
             <a:r>
@@ -4119,7 +4123,7 @@
         <p:spPr>
           <a:xfrm>
             <a:off x="567542" y="1216429"/>
-            <a:ext cx="4876656" cy="461665"/>
+            <a:ext cx="4956806" cy="461665"/>
           </a:xfrm>
           <a:prstGeom prst="rect">
             <a:avLst/>
@@ -4133,7 +4137,11 @@
           <a:lstStyle/>
           <a:p>
             <a:r>
-              <a:rPr lang="en-US" altLang="ja-JP" sz="2400" dirty="0"/>
+              <a:rPr lang="en-US" altLang="ja-JP" sz="2400" b="1" dirty="0">
+                <a:solidFill>
+                  <a:srgbClr val="FF0000"/>
+                </a:solidFill>
+              </a:rPr>
               <a:t>Main.cpp</a:t>
             </a:r>
             <a:r>
